--- a/poster.pptx
+++ b/poster.pptx
@@ -5338,7 +5338,7 @@
                 <a:latin typeface="Arial" panose="020B0604020202020204" pitchFamily="34" charset="0"/>
                 <a:cs typeface="Arial" panose="020B0604020202020204" pitchFamily="34" charset="0"/>
               </a:rPr>
-              <a:t>Dynamic Adaptability: The autonomous system effectively adapts to diverse room geometries, varying drone fleet sizes, and different wall reflectivity percentages.</a:t>
+              <a:t>Achieving robust and accurate real-time object detection requires a large, diverse and precisely annotated dataset that matches the target environment, thereby preventing overfitting and minimizing false positives.</a:t>
             </a:r>
           </a:p>
           <a:p>
@@ -5358,7 +5358,7 @@
                 <a:latin typeface="Arial" panose="020B0604020202020204" pitchFamily="34" charset="0"/>
                 <a:cs typeface="Arial" panose="020B0604020202020204" pitchFamily="34" charset="0"/>
               </a:rPr>
-              <a:t>The project successfully validated a fully autonomous SAR workflow. By strategically pivoting to Microsoft AirSim, we demonstrated that high-fidelity simulations and synthetic datasets can bridge critical hardware limitations, providing a robust platform for developing lifesaving algorithms.</a:t>
+              <a:t>The project successfully validated a fully autonomous SAR workflow. By pivoting to Microsoft AirSim, we demonstrated that high-fidelity simulations and synthetic datasets can bridge critical hardware limitations, providing a platform for developing lifesaving algorithms.</a:t>
             </a:r>
           </a:p>
         </p:txBody>
@@ -6848,7 +6848,7 @@
         </p:nvSpPr>
         <p:spPr bwMode="auto">
           <a:xfrm>
-            <a:off x="22986206" y="40848126"/>
+            <a:off x="22986206" y="40885343"/>
             <a:ext cx="4267200" cy="594355"/>
           </a:xfrm>
           <a:prstGeom prst="rect">
@@ -7388,7 +7388,7 @@
         </p:blipFill>
         <p:spPr>
           <a:xfrm>
-            <a:off x="20954971" y="36147464"/>
+            <a:off x="20954971" y="36184681"/>
             <a:ext cx="8051035" cy="4609217"/>
           </a:xfrm>
           <a:prstGeom prst="rect">
